--- a/Presentations/Agentic Systems - Welcome.pptx
+++ b/Presentations/Agentic Systems - Welcome.pptx
@@ -3501,7 +3501,7 @@
                 <a:cs typeface="Calibri"/>
                 <a:sym typeface="Calibri"/>
               </a:rPr>
-              <a:t>6 / 6</a:t>
+              <a:t>10 / 10</a:t>
             </a:r>
             <a:endParaRPr/>
           </a:p>
@@ -5455,7 +5455,7 @@
                 <a:cs typeface="Calibri"/>
                 <a:sym typeface="Calibri"/>
               </a:rPr>
-              <a:t>2 / 6</a:t>
+              <a:t>2 / 10</a:t>
             </a:r>
             <a:endParaRPr/>
           </a:p>
@@ -6414,7 +6414,7 @@
                 <a:cs typeface="Calibri"/>
                 <a:sym typeface="Calibri"/>
               </a:rPr>
-              <a:t>2 / 6</a:t>
+              <a:t>3 / 10</a:t>
             </a:r>
             <a:endParaRPr/>
           </a:p>
@@ -7068,7 +7068,7 @@
                 <a:cs typeface="Calibri"/>
                 <a:sym typeface="Calibri"/>
               </a:rPr>
-              <a:t>3 / 6</a:t>
+              <a:t>4 / 10</a:t>
             </a:r>
             <a:endParaRPr/>
           </a:p>
@@ -7398,7 +7398,7 @@
                 <a:cs typeface="Calibri"/>
                 <a:sym typeface="Calibri"/>
               </a:rPr>
-              <a:t>4 / 6</a:t>
+              <a:t>5 / 10</a:t>
             </a:r>
             <a:endParaRPr/>
           </a:p>
@@ -7728,7 +7728,7 @@
                 <a:cs typeface="Calibri"/>
                 <a:sym typeface="Calibri"/>
               </a:rPr>
-              <a:t>5 / 6</a:t>
+              <a:t>6 / 10</a:t>
             </a:r>
             <a:endParaRPr/>
           </a:p>
@@ -8058,7 +8058,7 @@
                 <a:cs typeface="Calibri"/>
                 <a:sym typeface="Calibri"/>
               </a:rPr>
-              <a:t>6 / 6</a:t>
+              <a:t>7 / 10</a:t>
             </a:r>
             <a:endParaRPr/>
           </a:p>
@@ -9050,7 +9050,7 @@
                 <a:cs typeface="Calibri"/>
                 <a:sym typeface="Calibri"/>
               </a:rPr>
-              <a:t>2 / 6</a:t>
+              <a:t>8 / 10</a:t>
             </a:r>
             <a:endParaRPr/>
           </a:p>
@@ -9368,7 +9368,7 @@
                 <a:cs typeface="Calibri"/>
                 <a:sym typeface="Calibri"/>
               </a:rPr>
-              <a:t>6 / 6</a:t>
+              <a:t>9 / 10</a:t>
             </a:r>
             <a:endParaRPr/>
           </a:p>
@@ -9884,6 +9884,341 @@
                 <a:sym typeface="Calibri"/>
               </a:rPr>
               <a:t> could we run something like that  on our own (university) HW…</a:t>
+            </a:r>
+            <a:endParaRPr i="1"/>
+          </a:p>
+        </p:txBody>
+      </p:sp>
+      <p:sp>
+        <p:nvSpPr>
+          <p:cNvPr id="116" name="Google Shape;116;p11"/>
+          <p:cNvSpPr/>
+          <p:nvPr/>
+        </p:nvSpPr>
+        <p:spPr>
+          <a:xfrm>
+            <a:off x="457200" y="3700000"/>
+            <a:ext cx="5303400" cy="2194500"/>
+          </a:xfrm>
+          <a:prstGeom prst="rect">
+            <a:avLst/>
+          </a:prstGeom>
+          <a:solidFill>
+            <a:srgbClr val="F4F6F9"/>
+          </a:solidFill>
+          <a:ln cap="flat" cmpd="sng" w="9525">
+            <a:solidFill>
+              <a:srgbClr val="D5DBE3"/>
+            </a:solidFill>
+            <a:prstDash val="solid"/>
+            <a:round/>
+            <a:headEnd len="sm" w="sm" type="none"/>
+            <a:tailEnd len="sm" w="sm" type="none"/>
+          </a:ln>
+        </p:spPr>
+        <p:txBody>
+          <a:bodyPr anchorCtr="0" anchor="t" bIns="137150" lIns="228600" spcFirstLastPara="1" rIns="228600" wrap="square" tIns="182875">
+            <a:noAutofit/>
+          </a:bodyPr>
+          <a:lstStyle/>
+          <a:p>
+            <a:pPr indent="0" lvl="0" marL="0" marR="0" rtl="0" algn="l">
+              <a:spcBef>
+                <a:spcPts val="0"/>
+              </a:spcBef>
+              <a:spcAft>
+                <a:spcPts val="0"/>
+              </a:spcAft>
+              <a:buClr>
+                <a:srgbClr val="2E7D5B"/>
+              </a:buClr>
+              <a:buSzPts val="1600"/>
+              <a:buFont typeface="Georgia"/>
+              <a:buNone/>
+            </a:pPr>
+            <a:r>
+              <a:rPr b="1" lang="en-US" sz="1600">
+                <a:solidFill>
+                  <a:srgbClr val="2E7D5B"/>
+                </a:solidFill>
+                <a:latin typeface="Georgia"/>
+                <a:ea typeface="Georgia"/>
+                <a:cs typeface="Georgia"/>
+                <a:sym typeface="Georgia"/>
+              </a:rPr>
+              <a:t>An Example: Galagos: AI-powered bioinformatics for researchers (Galagos GmbH </a:t>
+            </a:r>
+            <a:r>
+              <a:rPr lang="en-US" sz="1100" u="sng">
+                <a:solidFill>
+                  <a:schemeClr val="hlink"/>
+                </a:solidFill>
+                <a:hlinkClick r:id="rId4"/>
+              </a:rPr>
+              <a:t>https://galagos.ai/</a:t>
+            </a:r>
+            <a:r>
+              <a:rPr b="1" lang="en-US" sz="1600">
+                <a:solidFill>
+                  <a:srgbClr val="2E7D5B"/>
+                </a:solidFill>
+                <a:latin typeface="Georgia"/>
+                <a:ea typeface="Georgia"/>
+                <a:cs typeface="Georgia"/>
+                <a:sym typeface="Georgia"/>
+              </a:rPr>
+              <a:t>)</a:t>
+            </a:r>
+            <a:endParaRPr b="1" sz="1600">
+              <a:solidFill>
+                <a:srgbClr val="2E7D5B"/>
+              </a:solidFill>
+              <a:latin typeface="Georgia"/>
+              <a:ea typeface="Georgia"/>
+              <a:cs typeface="Georgia"/>
+              <a:sym typeface="Georgia"/>
+            </a:endParaRPr>
+          </a:p>
+          <a:p>
+            <a:pPr indent="0" lvl="0" marL="0" marR="0" rtl="0" algn="l">
+              <a:spcBef>
+                <a:spcPts val="0"/>
+              </a:spcBef>
+              <a:spcAft>
+                <a:spcPts val="0"/>
+              </a:spcAft>
+              <a:buClr>
+                <a:schemeClr val="dk1"/>
+              </a:buClr>
+              <a:buSzPts val="600"/>
+              <a:buFont typeface="Calibri"/>
+              <a:buNone/>
+            </a:pPr>
+            <a:r>
+              <a:t/>
+            </a:r>
+            <a:endParaRPr sz="600">
+              <a:solidFill>
+                <a:schemeClr val="dk1"/>
+              </a:solidFill>
+              <a:latin typeface="Calibri"/>
+              <a:ea typeface="Calibri"/>
+              <a:cs typeface="Calibri"/>
+              <a:sym typeface="Calibri"/>
+            </a:endParaRPr>
+          </a:p>
+          <a:p>
+            <a:pPr indent="-304800" lvl="0" marL="457200" marR="0" rtl="0" algn="l">
+              <a:spcBef>
+                <a:spcPts val="0"/>
+              </a:spcBef>
+              <a:spcAft>
+                <a:spcPts val="0"/>
+              </a:spcAft>
+              <a:buClr>
+                <a:srgbClr val="1A1A1A"/>
+              </a:buClr>
+              <a:buSzPts val="1200"/>
+              <a:buFont typeface="Calibri"/>
+              <a:buChar char="●"/>
+            </a:pPr>
+            <a:r>
+              <a:rPr lang="en-US" sz="1200">
+                <a:solidFill>
+                  <a:srgbClr val="1A1A1A"/>
+                </a:solidFill>
+                <a:latin typeface="Calibri"/>
+                <a:ea typeface="Calibri"/>
+                <a:cs typeface="Calibri"/>
+                <a:sym typeface="Calibri"/>
+              </a:rPr>
+              <a:t>Cheaper (free beta)</a:t>
+            </a:r>
+            <a:endParaRPr/>
+          </a:p>
+        </p:txBody>
+      </p:sp>
+      <p:sp>
+        <p:nvSpPr>
+          <p:cNvPr id="117" name="Google Shape;117;p11"/>
+          <p:cNvSpPr/>
+          <p:nvPr/>
+        </p:nvSpPr>
+        <p:spPr>
+          <a:xfrm>
+            <a:off x="5827875" y="3700000"/>
+            <a:ext cx="5303400" cy="2194500"/>
+          </a:xfrm>
+          <a:prstGeom prst="rect">
+            <a:avLst/>
+          </a:prstGeom>
+          <a:solidFill>
+            <a:srgbClr val="F4F6F9"/>
+          </a:solidFill>
+          <a:ln cap="flat" cmpd="sng" w="9525">
+            <a:solidFill>
+              <a:srgbClr val="D5DBE3"/>
+            </a:solidFill>
+            <a:prstDash val="solid"/>
+            <a:round/>
+            <a:headEnd len="sm" w="sm" type="none"/>
+            <a:tailEnd len="sm" w="sm" type="none"/>
+          </a:ln>
+        </p:spPr>
+        <p:txBody>
+          <a:bodyPr anchorCtr="0" anchor="t" bIns="137150" lIns="228600" spcFirstLastPara="1" rIns="228600" wrap="square" tIns="182875">
+            <a:noAutofit/>
+          </a:bodyPr>
+          <a:lstStyle/>
+          <a:p>
+            <a:pPr indent="0" lvl="0" marL="0" marR="0" rtl="0" algn="l">
+              <a:spcBef>
+                <a:spcPts val="0"/>
+              </a:spcBef>
+              <a:spcAft>
+                <a:spcPts val="0"/>
+              </a:spcAft>
+              <a:buClr>
+                <a:srgbClr val="2E7D5B"/>
+              </a:buClr>
+              <a:buSzPts val="1600"/>
+              <a:buFont typeface="Georgia"/>
+              <a:buNone/>
+            </a:pPr>
+            <a:r>
+              <a:rPr b="1" lang="en-US" sz="1600">
+                <a:solidFill>
+                  <a:srgbClr val="2E7D5B"/>
+                </a:solidFill>
+                <a:latin typeface="Georgia"/>
+                <a:ea typeface="Georgia"/>
+                <a:cs typeface="Georgia"/>
+                <a:sym typeface="Georgia"/>
+              </a:rPr>
+              <a:t>Limitations</a:t>
+            </a:r>
+            <a:endParaRPr b="1" sz="1600">
+              <a:solidFill>
+                <a:srgbClr val="2E7D5B"/>
+              </a:solidFill>
+              <a:latin typeface="Georgia"/>
+              <a:ea typeface="Georgia"/>
+              <a:cs typeface="Georgia"/>
+              <a:sym typeface="Georgia"/>
+            </a:endParaRPr>
+          </a:p>
+          <a:p>
+            <a:pPr indent="0" lvl="0" marL="0" marR="0" rtl="0" algn="l">
+              <a:spcBef>
+                <a:spcPts val="0"/>
+              </a:spcBef>
+              <a:spcAft>
+                <a:spcPts val="0"/>
+              </a:spcAft>
+              <a:buClr>
+                <a:schemeClr val="dk1"/>
+              </a:buClr>
+              <a:buSzPts val="600"/>
+              <a:buFont typeface="Calibri"/>
+              <a:buNone/>
+            </a:pPr>
+            <a:r>
+              <a:t/>
+            </a:r>
+            <a:endParaRPr sz="600">
+              <a:solidFill>
+                <a:schemeClr val="dk1"/>
+              </a:solidFill>
+              <a:latin typeface="Calibri"/>
+              <a:ea typeface="Calibri"/>
+              <a:cs typeface="Calibri"/>
+              <a:sym typeface="Calibri"/>
+            </a:endParaRPr>
+          </a:p>
+          <a:p>
+            <a:pPr indent="-304800" lvl="0" marL="457200" marR="0" rtl="0" algn="l">
+              <a:spcBef>
+                <a:spcPts val="0"/>
+              </a:spcBef>
+              <a:spcAft>
+                <a:spcPts val="0"/>
+              </a:spcAft>
+              <a:buClr>
+                <a:srgbClr val="1A1A1A"/>
+              </a:buClr>
+              <a:buSzPts val="1200"/>
+              <a:buFont typeface="Calibri"/>
+              <a:buChar char="●"/>
+            </a:pPr>
+            <a:r>
+              <a:rPr lang="en-US" sz="1200">
+                <a:solidFill>
+                  <a:srgbClr val="1A1A1A"/>
+                </a:solidFill>
+                <a:latin typeface="Calibri"/>
+                <a:ea typeface="Calibri"/>
+                <a:cs typeface="Calibri"/>
+                <a:sym typeface="Calibri"/>
+              </a:rPr>
+              <a:t>I have not tested it yet…</a:t>
+            </a:r>
+            <a:endParaRPr/>
+          </a:p>
+          <a:p>
+            <a:pPr indent="-304800" lvl="0" marL="457200" marR="0" rtl="0" algn="l">
+              <a:spcBef>
+                <a:spcPts val="0"/>
+              </a:spcBef>
+              <a:spcAft>
+                <a:spcPts val="0"/>
+              </a:spcAft>
+              <a:buClr>
+                <a:srgbClr val="1A1A1A"/>
+              </a:buClr>
+              <a:buSzPts val="1200"/>
+              <a:buFont typeface="Calibri"/>
+              <a:buChar char="●"/>
+            </a:pPr>
+            <a:r>
+              <a:rPr lang="en-US" sz="1200">
+                <a:solidFill>
+                  <a:srgbClr val="1A1A1A"/>
+                </a:solidFill>
+                <a:latin typeface="Calibri"/>
+                <a:ea typeface="Calibri"/>
+                <a:cs typeface="Calibri"/>
+                <a:sym typeface="Calibri"/>
+              </a:rPr>
+              <a:t>Limited data storage</a:t>
+            </a:r>
+            <a:endParaRPr/>
+          </a:p>
+          <a:p>
+            <a:pPr indent="-304800" lvl="0" marL="457200" marR="0" rtl="0" algn="l">
+              <a:spcBef>
+                <a:spcPts val="0"/>
+              </a:spcBef>
+              <a:spcAft>
+                <a:spcPts val="0"/>
+              </a:spcAft>
+              <a:buClr>
+                <a:srgbClr val="1A1A1A"/>
+              </a:buClr>
+              <a:buSzPts val="1200"/>
+              <a:buFont typeface="Calibri"/>
+              <a:buChar char="●"/>
+            </a:pPr>
+            <a:r>
+              <a:rPr i="1" lang="en-US" sz="1200">
+                <a:solidFill>
+                  <a:srgbClr val="1A1A1A"/>
+                </a:solidFill>
+                <a:latin typeface="Calibri"/>
+                <a:ea typeface="Calibri"/>
+                <a:cs typeface="Calibri"/>
+                <a:sym typeface="Calibri"/>
+              </a:rPr>
+              <a:t>If only could we run something like that on our own (university) HW…</a:t>
             </a:r>
             <a:endParaRPr i="1"/>
           </a:p>
